--- a/reports/midterm/phase-review.pptx
+++ b/reports/midterm/phase-review.pptx
@@ -5398,7 +5398,7 @@
                 <a:ea typeface="PingFang TC"/>
                 <a:cs typeface="PingFang TC"/>
               </a:rPr>
-              <a:t>林崇偉 S11259031（隊員）</a:t>
+              <a:t>林崇瑋 S11259031（隊員）</a:t>
             </a:r>
           </a:p>
         </p:txBody>
@@ -10695,7 +10695,7 @@
                 <a:ea typeface="PingFang TC"/>
                 <a:cs typeface="PingFang TC"/>
               </a:rPr>
-              <a:t>林崇偉  S11259031</a:t>
+              <a:t>林崇瑋  S11259031</a:t>
             </a:r>
           </a:p>
         </p:txBody>
